--- a/CSE281/Lecture 4.pptx
+++ b/CSE281/Lecture 4.pptx
@@ -289,7 +289,7 @@
           <a:p>
             <a:fld id="{48A87A34-81AB-432B-8DAE-1953F412C126}" type="datetimeFigureOut">
               <a:rPr lang="en-US" dirty="0"/>
-              <a:t>7/28/2025</a:t>
+              <a:t>11/9/2025</a:t>
             </a:fld>
             <a:endParaRPr lang="en-US" dirty="0"/>
           </a:p>
@@ -551,7 +551,7 @@
           <a:p>
             <a:fld id="{48A87A34-81AB-432B-8DAE-1953F412C126}" type="datetimeFigureOut">
               <a:rPr lang="en-US" dirty="0"/>
-              <a:t>7/28/2025</a:t>
+              <a:t>11/9/2025</a:t>
             </a:fld>
             <a:endParaRPr lang="en-US" dirty="0"/>
           </a:p>
@@ -778,7 +778,7 @@
             <a:fld id="{48A87A34-81AB-432B-8DAE-1953F412C126}" type="datetimeFigureOut">
               <a:rPr lang="en-US" dirty="0"/>
               <a:pPr/>
-              <a:t>7/28/2025</a:t>
+              <a:t>11/9/2025</a:t>
             </a:fld>
             <a:endParaRPr lang="en-US" dirty="0"/>
           </a:p>
@@ -1084,7 +1084,7 @@
             <a:fld id="{48A87A34-81AB-432B-8DAE-1953F412C126}" type="datetimeFigureOut">
               <a:rPr lang="en-US" dirty="0"/>
               <a:pPr/>
-              <a:t>7/28/2025</a:t>
+              <a:t>11/9/2025</a:t>
             </a:fld>
             <a:endParaRPr lang="en-US" dirty="0"/>
           </a:p>
@@ -1553,7 +1553,7 @@
             <a:fld id="{48A87A34-81AB-432B-8DAE-1953F412C126}" type="datetimeFigureOut">
               <a:rPr lang="en-US" dirty="0"/>
               <a:pPr/>
-              <a:t>7/28/2025</a:t>
+              <a:t>11/9/2025</a:t>
             </a:fld>
             <a:endParaRPr lang="en-US" dirty="0"/>
           </a:p>
@@ -2095,7 +2095,7 @@
           <a:p>
             <a:fld id="{48A87A34-81AB-432B-8DAE-1953F412C126}" type="datetimeFigureOut">
               <a:rPr lang="en-US" dirty="0"/>
-              <a:t>7/28/2025</a:t>
+              <a:t>11/9/2025</a:t>
             </a:fld>
             <a:endParaRPr lang="en-US" dirty="0"/>
           </a:p>
@@ -2864,7 +2864,7 @@
           <a:p>
             <a:fld id="{48A87A34-81AB-432B-8DAE-1953F412C126}" type="datetimeFigureOut">
               <a:rPr lang="en-US" dirty="0"/>
-              <a:t>7/28/2025</a:t>
+              <a:t>11/9/2025</a:t>
             </a:fld>
             <a:endParaRPr lang="en-US" dirty="0"/>
           </a:p>
@@ -3034,7 +3034,7 @@
           <a:p>
             <a:fld id="{48A87A34-81AB-432B-8DAE-1953F412C126}" type="datetimeFigureOut">
               <a:rPr lang="en-US" dirty="0"/>
-              <a:t>7/28/2025</a:t>
+              <a:t>11/9/2025</a:t>
             </a:fld>
             <a:endParaRPr lang="en-US" dirty="0"/>
           </a:p>
@@ -3253,7 +3253,7 @@
             <a:fld id="{48A87A34-81AB-432B-8DAE-1953F412C126}" type="datetimeFigureOut">
               <a:rPr lang="en-US" dirty="0"/>
               <a:pPr/>
-              <a:t>7/28/2025</a:t>
+              <a:t>11/9/2025</a:t>
             </a:fld>
             <a:endParaRPr lang="en-US" dirty="0"/>
           </a:p>
@@ -3428,7 +3428,7 @@
           <a:p>
             <a:fld id="{48A87A34-81AB-432B-8DAE-1953F412C126}" type="datetimeFigureOut">
               <a:rPr lang="en-US" dirty="0"/>
-              <a:t>7/28/2025</a:t>
+              <a:t>11/9/2025</a:t>
             </a:fld>
             <a:endParaRPr lang="en-US" dirty="0"/>
           </a:p>
@@ -3713,7 +3713,7 @@
             <a:fld id="{48A87A34-81AB-432B-8DAE-1953F412C126}" type="datetimeFigureOut">
               <a:rPr lang="en-US" dirty="0"/>
               <a:pPr/>
-              <a:t>7/28/2025</a:t>
+              <a:t>11/9/2025</a:t>
             </a:fld>
             <a:endParaRPr lang="en-US" dirty="0"/>
           </a:p>
@@ -3950,7 +3950,7 @@
           <a:p>
             <a:fld id="{48A87A34-81AB-432B-8DAE-1953F412C126}" type="datetimeFigureOut">
               <a:rPr lang="en-US" dirty="0"/>
-              <a:t>7/28/2025</a:t>
+              <a:t>11/9/2025</a:t>
             </a:fld>
             <a:endParaRPr lang="en-US" dirty="0"/>
           </a:p>
@@ -4324,7 +4324,7 @@
           <a:p>
             <a:fld id="{48A87A34-81AB-432B-8DAE-1953F412C126}" type="datetimeFigureOut">
               <a:rPr lang="en-US" dirty="0"/>
-              <a:t>7/28/2025</a:t>
+              <a:t>11/9/2025</a:t>
             </a:fld>
             <a:endParaRPr lang="en-US" dirty="0"/>
           </a:p>
@@ -4437,7 +4437,7 @@
           <a:p>
             <a:fld id="{48A87A34-81AB-432B-8DAE-1953F412C126}" type="datetimeFigureOut">
               <a:rPr lang="en-US" dirty="0"/>
-              <a:t>7/28/2025</a:t>
+              <a:t>11/9/2025</a:t>
             </a:fld>
             <a:endParaRPr lang="en-US" dirty="0"/>
           </a:p>
@@ -4527,7 +4527,7 @@
           <a:p>
             <a:fld id="{48A87A34-81AB-432B-8DAE-1953F412C126}" type="datetimeFigureOut">
               <a:rPr lang="en-US" dirty="0"/>
-              <a:t>7/28/2025</a:t>
+              <a:t>11/9/2025</a:t>
             </a:fld>
             <a:endParaRPr lang="en-US" dirty="0"/>
           </a:p>
@@ -4771,7 +4771,7 @@
           <a:p>
             <a:fld id="{48A87A34-81AB-432B-8DAE-1953F412C126}" type="datetimeFigureOut">
               <a:rPr lang="en-US" dirty="0"/>
-              <a:t>7/28/2025</a:t>
+              <a:t>11/9/2025</a:t>
             </a:fld>
             <a:endParaRPr lang="en-US" dirty="0"/>
           </a:p>
@@ -5023,7 +5023,7 @@
           <a:p>
             <a:fld id="{48A87A34-81AB-432B-8DAE-1953F412C126}" type="datetimeFigureOut">
               <a:rPr lang="en-US" dirty="0"/>
-              <a:t>7/28/2025</a:t>
+              <a:t>11/9/2025</a:t>
             </a:fld>
             <a:endParaRPr lang="en-US" dirty="0"/>
           </a:p>
@@ -5262,7 +5262,7 @@
             <a:fld id="{48A87A34-81AB-432B-8DAE-1953F412C126}" type="datetimeFigureOut">
               <a:rPr lang="en-US" dirty="0"/>
               <a:pPr/>
-              <a:t>7/28/2025</a:t>
+              <a:t>11/9/2025</a:t>
             </a:fld>
             <a:endParaRPr lang="en-US" dirty="0"/>
           </a:p>
@@ -6435,7 +6435,13 @@
       </p:sp>
       <p:pic>
         <p:nvPicPr>
-          <p:cNvPr id="6" name="Picture 5"/>
+          <p:cNvPr id="4" name="Picture 3">
+            <a:extLst>
+              <a:ext uri="{FF2B5EF4-FFF2-40B4-BE49-F238E27FC236}">
+                <a16:creationId xmlns:a16="http://schemas.microsoft.com/office/drawing/2014/main" id="{ECC06224-38BF-D559-CB00-4295E6C7908F}"/>
+              </a:ext>
+            </a:extLst>
+          </p:cNvPr>
           <p:cNvPicPr>
             <a:picLocks noChangeAspect="1"/>
           </p:cNvPicPr>
@@ -6443,14 +6449,15 @@
         </p:nvPicPr>
         <p:blipFill>
           <a:blip r:embed="rId2"/>
+          <a:srcRect b="18096"/>
           <a:stretch>
             <a:fillRect/>
           </a:stretch>
         </p:blipFill>
         <p:spPr>
           <a:xfrm>
-            <a:off x="781265" y="2846711"/>
-            <a:ext cx="5037641" cy="3655689"/>
+            <a:off x="5786835" y="823965"/>
+            <a:ext cx="6988985" cy="5617028"/>
           </a:xfrm>
           <a:prstGeom prst="rect">
             <a:avLst/>
@@ -6459,7 +6466,13 @@
       </p:pic>
       <p:pic>
         <p:nvPicPr>
-          <p:cNvPr id="7" name="Picture 6"/>
+          <p:cNvPr id="9" name="Picture 8">
+            <a:extLst>
+              <a:ext uri="{FF2B5EF4-FFF2-40B4-BE49-F238E27FC236}">
+                <a16:creationId xmlns:a16="http://schemas.microsoft.com/office/drawing/2014/main" id="{9A36969E-CC9B-B18F-3C65-B9BE27348A8B}"/>
+              </a:ext>
+            </a:extLst>
+          </p:cNvPr>
           <p:cNvPicPr>
             <a:picLocks noChangeAspect="1"/>
           </p:cNvPicPr>
@@ -6473,8 +6486,8 @@
         </p:blipFill>
         <p:spPr>
           <a:xfrm>
-            <a:off x="6115765" y="2846711"/>
-            <a:ext cx="5037641" cy="3812507"/>
+            <a:off x="261623" y="3035126"/>
+            <a:ext cx="5438775" cy="3219450"/>
           </a:xfrm>
           <a:prstGeom prst="rect">
             <a:avLst/>
@@ -6543,9 +6556,57 @@
           </a:p>
         </p:txBody>
       </p:sp>
+      <p:sp>
+        <p:nvSpPr>
+          <p:cNvPr id="5" name="Rectangle 4"/>
+          <p:cNvSpPr/>
+          <p:nvPr/>
+        </p:nvSpPr>
+        <p:spPr>
+          <a:xfrm>
+            <a:off x="483056" y="2191481"/>
+            <a:ext cx="4947926" cy="923330"/>
+          </a:xfrm>
+          <a:prstGeom prst="rect">
+            <a:avLst/>
+          </a:prstGeom>
+        </p:spPr>
+        <p:txBody>
+          <a:bodyPr wrap="square">
+            <a:spAutoFit/>
+          </a:bodyPr>
+          <a:lstStyle/>
+          <a:p>
+            <a:pPr>
+              <a:buFont typeface="Arial" panose="020B0604020202020204" pitchFamily="34" charset="0"/>
+              <a:buChar char="•"/>
+            </a:pPr>
+            <a:r>
+              <a:rPr lang="en-US" dirty="0"/>
+              <a:t>A class is derived from another derived class, forming a chain of inheritance.</a:t>
+            </a:r>
+          </a:p>
+          <a:p>
+            <a:pPr>
+              <a:buFont typeface="Arial" panose="020B0604020202020204" pitchFamily="34" charset="0"/>
+              <a:buChar char="•"/>
+            </a:pPr>
+            <a:r>
+              <a:rPr lang="en-US" dirty="0"/>
+              <a:t>Supports multi-level code reuse.</a:t>
+            </a:r>
+          </a:p>
+        </p:txBody>
+      </p:sp>
       <p:pic>
         <p:nvPicPr>
-          <p:cNvPr id="4" name="Picture 3"/>
+          <p:cNvPr id="6" name="Picture 5">
+            <a:extLst>
+              <a:ext uri="{FF2B5EF4-FFF2-40B4-BE49-F238E27FC236}">
+                <a16:creationId xmlns:a16="http://schemas.microsoft.com/office/drawing/2014/main" id="{84293CAD-09C8-654F-7032-12AAA100ECA5}"/>
+              </a:ext>
+            </a:extLst>
+          </p:cNvPr>
           <p:cNvPicPr>
             <a:picLocks noChangeAspect="1"/>
           </p:cNvPicPr>
@@ -6559,56 +6620,44 @@
         </p:blipFill>
         <p:spPr>
           <a:xfrm>
-            <a:off x="5080001" y="1016448"/>
-            <a:ext cx="6733308" cy="5417298"/>
+            <a:off x="5153025" y="76200"/>
+            <a:ext cx="7038975" cy="6705600"/>
           </a:xfrm>
           <a:prstGeom prst="rect">
             <a:avLst/>
           </a:prstGeom>
         </p:spPr>
       </p:pic>
-      <p:sp>
-        <p:nvSpPr>
-          <p:cNvPr id="5" name="Rectangle 4"/>
-          <p:cNvSpPr/>
+      <p:pic>
+        <p:nvPicPr>
+          <p:cNvPr id="8" name="Picture 7">
+            <a:extLst>
+              <a:ext uri="{FF2B5EF4-FFF2-40B4-BE49-F238E27FC236}">
+                <a16:creationId xmlns:a16="http://schemas.microsoft.com/office/drawing/2014/main" id="{7496406A-3531-1C97-44E8-738C8123F4A3}"/>
+              </a:ext>
+            </a:extLst>
+          </p:cNvPr>
+          <p:cNvPicPr>
+            <a:picLocks noChangeAspect="1"/>
+          </p:cNvPicPr>
           <p:nvPr/>
-        </p:nvSpPr>
-        <p:spPr>
-          <a:xfrm>
-            <a:off x="483056" y="2191481"/>
-            <a:ext cx="4947926" cy="923330"/>
+        </p:nvPicPr>
+        <p:blipFill>
+          <a:blip r:embed="rId3"/>
+          <a:stretch>
+            <a:fillRect/>
+          </a:stretch>
+        </p:blipFill>
+        <p:spPr>
+          <a:xfrm>
+            <a:off x="0" y="3429000"/>
+            <a:ext cx="5199542" cy="2961213"/>
           </a:xfrm>
           <a:prstGeom prst="rect">
             <a:avLst/>
           </a:prstGeom>
         </p:spPr>
-        <p:txBody>
-          <a:bodyPr wrap="square">
-            <a:spAutoFit/>
-          </a:bodyPr>
-          <a:lstStyle/>
-          <a:p>
-            <a:pPr>
-              <a:buFont typeface="Arial" panose="020B0604020202020204" pitchFamily="34" charset="0"/>
-              <a:buChar char="•"/>
-            </a:pPr>
-            <a:r>
-              <a:rPr lang="en-US" dirty="0"/>
-              <a:t>A class is derived from another derived class, forming a chain of inheritance.</a:t>
-            </a:r>
-          </a:p>
-          <a:p>
-            <a:pPr>
-              <a:buFont typeface="Arial" panose="020B0604020202020204" pitchFamily="34" charset="0"/>
-              <a:buChar char="•"/>
-            </a:pPr>
-            <a:r>
-              <a:rPr lang="en-US" dirty="0"/>
-              <a:t>Supports multi-level code reuse.</a:t>
-            </a:r>
-          </a:p>
-        </p:txBody>
-      </p:sp>
+      </p:pic>
     </p:spTree>
     <p:extLst>
       <p:ext uri="{BB962C8B-B14F-4D97-AF65-F5344CB8AC3E}">
@@ -6679,9 +6728,69 @@
           </a:p>
         </p:txBody>
       </p:sp>
+      <p:sp>
+        <p:nvSpPr>
+          <p:cNvPr id="5" name="Rectangle 4"/>
+          <p:cNvSpPr/>
+          <p:nvPr/>
+        </p:nvSpPr>
+        <p:spPr>
+          <a:xfrm>
+            <a:off x="484406" y="2246854"/>
+            <a:ext cx="4789558" cy="1200329"/>
+          </a:xfrm>
+          <a:prstGeom prst="rect">
+            <a:avLst/>
+          </a:prstGeom>
+        </p:spPr>
+        <p:txBody>
+          <a:bodyPr wrap="square">
+            <a:spAutoFit/>
+          </a:bodyPr>
+          <a:lstStyle/>
+          <a:p>
+            <a:pPr>
+              <a:buFont typeface="Arial" panose="020B0604020202020204" pitchFamily="34" charset="0"/>
+              <a:buChar char="•"/>
+            </a:pPr>
+            <a:r>
+              <a:rPr lang="en-US" dirty="0"/>
+              <a:t>Multiple subclasses inherit from a </a:t>
+            </a:r>
+          </a:p>
+          <a:p>
+            <a:r>
+              <a:rPr lang="en-US" dirty="0"/>
+              <a:t> single superclass.</a:t>
+            </a:r>
+          </a:p>
+          <a:p>
+            <a:pPr>
+              <a:buFont typeface="Arial" panose="020B0604020202020204" pitchFamily="34" charset="0"/>
+              <a:buChar char="•"/>
+            </a:pPr>
+            <a:r>
+              <a:rPr lang="en-US" dirty="0"/>
+              <a:t>Promotes a hierarchical </a:t>
+            </a:r>
+          </a:p>
+          <a:p>
+            <a:r>
+              <a:rPr lang="en-US" dirty="0"/>
+              <a:t> classification.</a:t>
+            </a:r>
+          </a:p>
+        </p:txBody>
+      </p:sp>
       <p:pic>
         <p:nvPicPr>
-          <p:cNvPr id="2" name="Picture 1"/>
+          <p:cNvPr id="6" name="Picture 5">
+            <a:extLst>
+              <a:ext uri="{FF2B5EF4-FFF2-40B4-BE49-F238E27FC236}">
+                <a16:creationId xmlns:a16="http://schemas.microsoft.com/office/drawing/2014/main" id="{1987432F-BB2E-4AC1-1C71-EB52DB752B7B}"/>
+              </a:ext>
+            </a:extLst>
+          </p:cNvPr>
           <p:cNvPicPr>
             <a:picLocks noChangeAspect="1"/>
           </p:cNvPicPr>
@@ -6695,56 +6804,45 @@
         </p:blipFill>
         <p:spPr>
           <a:xfrm>
-            <a:off x="5629998" y="1119195"/>
-            <a:ext cx="5550185" cy="5321573"/>
+            <a:off x="4712539" y="0"/>
+            <a:ext cx="7479461" cy="6858000"/>
           </a:xfrm>
           <a:prstGeom prst="rect">
             <a:avLst/>
           </a:prstGeom>
         </p:spPr>
       </p:pic>
-      <p:sp>
-        <p:nvSpPr>
-          <p:cNvPr id="5" name="Rectangle 4"/>
-          <p:cNvSpPr/>
+      <p:pic>
+        <p:nvPicPr>
+          <p:cNvPr id="8" name="Picture 7">
+            <a:extLst>
+              <a:ext uri="{FF2B5EF4-FFF2-40B4-BE49-F238E27FC236}">
+                <a16:creationId xmlns:a16="http://schemas.microsoft.com/office/drawing/2014/main" id="{E8AD0C9E-7F7F-1AF1-9FC8-A79B16876927}"/>
+              </a:ext>
+            </a:extLst>
+          </p:cNvPr>
+          <p:cNvPicPr>
+            <a:picLocks noChangeAspect="1"/>
+          </p:cNvPicPr>
           <p:nvPr/>
-        </p:nvSpPr>
-        <p:spPr>
-          <a:xfrm>
-            <a:off x="484406" y="2246854"/>
-            <a:ext cx="4789558" cy="923330"/>
+        </p:nvPicPr>
+        <p:blipFill>
+          <a:blip r:embed="rId3"/>
+          <a:srcRect r="32188"/>
+          <a:stretch>
+            <a:fillRect/>
+          </a:stretch>
+        </p:blipFill>
+        <p:spPr>
+          <a:xfrm>
+            <a:off x="116409" y="3447183"/>
+            <a:ext cx="3952979" cy="3048000"/>
           </a:xfrm>
           <a:prstGeom prst="rect">
             <a:avLst/>
           </a:prstGeom>
         </p:spPr>
-        <p:txBody>
-          <a:bodyPr wrap="square">
-            <a:spAutoFit/>
-          </a:bodyPr>
-          <a:lstStyle/>
-          <a:p>
-            <a:pPr>
-              <a:buFont typeface="Arial" panose="020B0604020202020204" pitchFamily="34" charset="0"/>
-              <a:buChar char="•"/>
-            </a:pPr>
-            <a:r>
-              <a:rPr lang="en-US" dirty="0"/>
-              <a:t>Multiple subclasses inherit from a single superclass.</a:t>
-            </a:r>
-          </a:p>
-          <a:p>
-            <a:pPr>
-              <a:buFont typeface="Arial" panose="020B0604020202020204" pitchFamily="34" charset="0"/>
-              <a:buChar char="•"/>
-            </a:pPr>
-            <a:r>
-              <a:rPr lang="en-US" dirty="0"/>
-              <a:t>Promotes a hierarchical classification.</a:t>
-            </a:r>
-          </a:p>
-        </p:txBody>
-      </p:sp>
+      </p:pic>
     </p:spTree>
     <p:extLst>
       <p:ext uri="{BB962C8B-B14F-4D97-AF65-F5344CB8AC3E}">
